--- a/data/Git_Advanced_Presentation.pptx
+++ b/data/Git_Advanced_Presentation.pptx
@@ -322,7 +322,7 @@
           <a:p>
             <a:fld id="{5BCAD085-E8A6-8845-BD4E-CB4CCA059FC4}" type="datetimeFigureOut">
               <a:rPr lang="en-US" smtClean="0"/>
-              <a:t>2/23/2026</a:t>
+              <a:t>2/24/2026</a:t>
             </a:fld>
             <a:endParaRPr lang="en-US"/>
           </a:p>
@@ -490,7 +490,7 @@
           <a:p>
             <a:fld id="{5BCAD085-E8A6-8845-BD4E-CB4CCA059FC4}" type="datetimeFigureOut">
               <a:rPr lang="en-US" smtClean="0"/>
-              <a:t>2/23/2026</a:t>
+              <a:t>2/24/2026</a:t>
             </a:fld>
             <a:endParaRPr lang="en-US"/>
           </a:p>
@@ -668,7 +668,7 @@
           <a:p>
             <a:fld id="{5BCAD085-E8A6-8845-BD4E-CB4CCA059FC4}" type="datetimeFigureOut">
               <a:rPr lang="en-US" smtClean="0"/>
-              <a:t>2/23/2026</a:t>
+              <a:t>2/24/2026</a:t>
             </a:fld>
             <a:endParaRPr lang="en-US"/>
           </a:p>
@@ -836,7 +836,7 @@
           <a:p>
             <a:fld id="{5BCAD085-E8A6-8845-BD4E-CB4CCA059FC4}" type="datetimeFigureOut">
               <a:rPr lang="en-US" smtClean="0"/>
-              <a:t>2/23/2026</a:t>
+              <a:t>2/24/2026</a:t>
             </a:fld>
             <a:endParaRPr lang="en-US"/>
           </a:p>
@@ -1081,7 +1081,7 @@
           <a:p>
             <a:fld id="{5BCAD085-E8A6-8845-BD4E-CB4CCA059FC4}" type="datetimeFigureOut">
               <a:rPr lang="en-US" smtClean="0"/>
-              <a:t>2/23/2026</a:t>
+              <a:t>2/24/2026</a:t>
             </a:fld>
             <a:endParaRPr lang="en-US"/>
           </a:p>
@@ -1366,7 +1366,7 @@
           <a:p>
             <a:fld id="{5BCAD085-E8A6-8845-BD4E-CB4CCA059FC4}" type="datetimeFigureOut">
               <a:rPr lang="en-US" smtClean="0"/>
-              <a:t>2/23/2026</a:t>
+              <a:t>2/24/2026</a:t>
             </a:fld>
             <a:endParaRPr lang="en-US"/>
           </a:p>
@@ -1785,7 +1785,7 @@
           <a:p>
             <a:fld id="{5BCAD085-E8A6-8845-BD4E-CB4CCA059FC4}" type="datetimeFigureOut">
               <a:rPr lang="en-US" smtClean="0"/>
-              <a:t>2/23/2026</a:t>
+              <a:t>2/24/2026</a:t>
             </a:fld>
             <a:endParaRPr lang="en-US"/>
           </a:p>
@@ -1902,7 +1902,7 @@
           <a:p>
             <a:fld id="{5BCAD085-E8A6-8845-BD4E-CB4CCA059FC4}" type="datetimeFigureOut">
               <a:rPr lang="en-US" smtClean="0"/>
-              <a:t>2/23/2026</a:t>
+              <a:t>2/24/2026</a:t>
             </a:fld>
             <a:endParaRPr lang="en-US"/>
           </a:p>
@@ -1997,7 +1997,7 @@
           <a:p>
             <a:fld id="{5BCAD085-E8A6-8845-BD4E-CB4CCA059FC4}" type="datetimeFigureOut">
               <a:rPr lang="en-US" smtClean="0"/>
-              <a:t>2/23/2026</a:t>
+              <a:t>2/24/2026</a:t>
             </a:fld>
             <a:endParaRPr lang="en-US"/>
           </a:p>
@@ -2272,7 +2272,7 @@
           <a:p>
             <a:fld id="{5BCAD085-E8A6-8845-BD4E-CB4CCA059FC4}" type="datetimeFigureOut">
               <a:rPr lang="en-US" smtClean="0"/>
-              <a:t>2/23/2026</a:t>
+              <a:t>2/24/2026</a:t>
             </a:fld>
             <a:endParaRPr lang="en-US"/>
           </a:p>
@@ -2524,7 +2524,7 @@
           <a:p>
             <a:fld id="{5BCAD085-E8A6-8845-BD4E-CB4CCA059FC4}" type="datetimeFigureOut">
               <a:rPr lang="en-US" smtClean="0"/>
-              <a:t>2/23/2026</a:t>
+              <a:t>2/24/2026</a:t>
             </a:fld>
             <a:endParaRPr lang="en-US"/>
           </a:p>
@@ -2735,7 +2735,7 @@
           <a:p>
             <a:fld id="{5BCAD085-E8A6-8845-BD4E-CB4CCA059FC4}" type="datetimeFigureOut">
               <a:rPr lang="en-US" smtClean="0"/>
-              <a:t>2/23/2026</a:t>
+              <a:t>2/24/2026</a:t>
             </a:fld>
             <a:endParaRPr lang="en-US"/>
           </a:p>
@@ -3122,7 +3122,9 @@
         </p:nvSpPr>
         <p:spPr/>
         <p:txBody>
-          <a:bodyPr/>
+          <a:bodyPr>
+            <a:normAutofit fontScale="90000"/>
+          </a:bodyPr>
           <a:lstStyle/>
           <a:p>
             <a:r>
@@ -3928,7 +3930,9 @@
         </p:nvSpPr>
         <p:spPr/>
         <p:txBody>
-          <a:bodyPr/>
+          <a:bodyPr>
+            <a:normAutofit fontScale="90000"/>
+          </a:bodyPr>
           <a:lstStyle/>
           <a:p>
             <a:r>
@@ -4625,7 +4629,9 @@
         </p:nvSpPr>
         <p:spPr/>
         <p:txBody>
-          <a:bodyPr/>
+          <a:bodyPr>
+            <a:normAutofit lnSpcReduction="10000"/>
+          </a:bodyPr>
           <a:lstStyle/>
           <a:p>
             <a:r>
@@ -5549,6 +5555,67 @@
             <a:r>
               <a:rPr dirty="0"/>
               <a:t>feature --------C</a:t>
+            </a:r>
+          </a:p>
+        </p:txBody>
+      </p:sp>
+      <p:sp>
+        <p:nvSpPr>
+          <p:cNvPr id="4" name="TextBox 3">
+            <a:extLst>
+              <a:ext uri="{FF2B5EF4-FFF2-40B4-BE49-F238E27FC236}">
+                <a16:creationId xmlns:a16="http://schemas.microsoft.com/office/drawing/2014/main" id="{924415BB-C6E5-90C8-7B5F-004C7F620018}"/>
+              </a:ext>
+            </a:extLst>
+          </p:cNvPr>
+          <p:cNvSpPr txBox="1"/>
+          <p:nvPr/>
+        </p:nvSpPr>
+        <p:spPr>
+          <a:xfrm>
+            <a:off x="4168877" y="4766312"/>
+            <a:ext cx="4748981" cy="1446550"/>
+          </a:xfrm>
+          <a:prstGeom prst="rect">
+            <a:avLst/>
+          </a:prstGeom>
+          <a:noFill/>
+        </p:spPr>
+        <p:txBody>
+          <a:bodyPr wrap="square" rtlCol="0">
+            <a:spAutoFit/>
+          </a:bodyPr>
+          <a:lstStyle/>
+          <a:p>
+            <a:r>
+              <a:rPr lang="en-IN" sz="2200" dirty="0"/>
+              <a:t>After merge: main----</a:t>
+            </a:r>
+            <a:r>
+              <a:rPr lang="pt-BR" sz="2200" dirty="0"/>
+              <a:t>A ---- B ---- D</a:t>
+            </a:r>
+          </a:p>
+          <a:p>
+            <a:r>
+              <a:rPr lang="pt-BR" sz="2200" dirty="0"/>
+              <a:t>                                                \         \</a:t>
+            </a:r>
+          </a:p>
+          <a:p>
+            <a:r>
+              <a:rPr lang="pt-BR" sz="2200" dirty="0"/>
+              <a:t>                                                 C ---- M</a:t>
+            </a:r>
+          </a:p>
+          <a:p>
+            <a:r>
+              <a:rPr lang="pt-BR" sz="2200" dirty="0"/>
+              <a:t>‘M’ is the new commit</a:t>
+            </a:r>
+            <a:r>
+              <a:rPr lang="en-IN" sz="2200" dirty="0"/>
+              <a:t>.          </a:t>
             </a:r>
           </a:p>
         </p:txBody>
